--- a/cdtst/문해프/숙제ppt/숙제7. 최단 경로 알고리즘.pptx
+++ b/cdtst/문해프/숙제ppt/숙제7. 최단 경로 알고리즘.pptx
@@ -281,7 +281,7 @@
               <a:pPr>
                 <a:defRPr/>
               </a:pPr>
-              <a:t>2026-03-19</a:t>
+              <a:t>2026-04-16</a:t>
             </a:fld>
             <a:endParaRPr lang="ko-KR" altLang="en-US"/>
           </a:p>
@@ -7587,27 +7587,27 @@
               <a:t>6. </a:t>
             </a:r>
             <a:r>
-              <a:rPr lang="ko-KR" altLang="en-US" sz="2800" dirty="0"/>
-              <a:t>파티</a:t>
-            </a:r>
-            <a:r>
-              <a:rPr lang="en-US" altLang="ko-KR" sz="2800" dirty="0"/>
+              <a:rPr lang="ko-KR" altLang="en-US" sz="2800" dirty="0" smtClean="0"/>
+              <a:t>파티 </a:t>
+            </a:r>
+            <a:r>
+              <a:rPr lang="en-US" altLang="ko-KR" sz="2800" dirty="0" smtClean="0"/>
               <a:t>(</a:t>
             </a:r>
             <a:r>
-              <a:rPr lang="ko-KR" altLang="en-US" sz="2800" dirty="0"/>
+              <a:rPr lang="en-US" altLang="ko-KR" sz="2800" dirty="0" err="1" smtClean="0"/>
+              <a:t>TUKorea</a:t>
+            </a:r>
+            <a:r>
+              <a:rPr lang="en-US" altLang="ko-KR" sz="2800" dirty="0" smtClean="0"/>
+              <a:t>, </a:t>
+            </a:r>
+            <a:r>
+              <a:rPr lang="ko-KR" altLang="en-US" sz="2800" dirty="0" smtClean="0"/>
               <a:t>백준</a:t>
             </a:r>
             <a:r>
-              <a:rPr lang="en-US" altLang="ko-KR" sz="2800" dirty="0"/>
-              <a:t>, </a:t>
-            </a:r>
-            <a:r>
-              <a:rPr lang="en-US" altLang="ko-KR" sz="2800" dirty="0" err="1"/>
-              <a:t>TUKorea</a:t>
-            </a:r>
-            <a:r>
-              <a:rPr lang="en-US" altLang="ko-KR" sz="2800" dirty="0"/>
+              <a:rPr lang="en-US" altLang="ko-KR" sz="2800" dirty="0" smtClean="0"/>
               <a:t>, </a:t>
             </a:r>
             <a:r>
@@ -7622,8 +7622,23 @@
               <a:rPr lang="en-US" altLang="ko-KR" sz="2800" dirty="0"/>
             </a:br>
             <a:r>
-              <a:rPr lang="en-US" altLang="ko-KR" sz="2800" dirty="0"/>
-              <a:t>http://210.93.60.51/problem/0163</a:t>
+              <a:rPr lang="en-US" altLang="ko-KR" sz="2000" dirty="0"/>
+              <a:t>http://</a:t>
+            </a:r>
+            <a:r>
+              <a:rPr lang="en-US" altLang="ko-KR" sz="2000" dirty="0" smtClean="0"/>
+              <a:t>210.93.60.51/problem/0163</a:t>
+            </a:r>
+            <a:r>
+              <a:rPr lang="en-US" altLang="ko-KR" sz="2000" dirty="0"/>
+              <a:t/>
+            </a:r>
+            <a:br>
+              <a:rPr lang="en-US" altLang="ko-KR" sz="2000" dirty="0"/>
+            </a:br>
+            <a:r>
+              <a:rPr lang="en-US" altLang="ko-KR" sz="2000" dirty="0"/>
+              <a:t>https://www.acmicpc.net/problem/1238</a:t>
             </a:r>
             <a:endParaRPr lang="ko-KR" altLang="en-US" sz="2000" dirty="0"/>
           </a:p>
@@ -9962,11 +9977,19 @@
               <a:t>택배 배송 </a:t>
             </a:r>
             <a:r>
-              <a:rPr lang="en-US" altLang="ko-KR" sz="2800" dirty="0"/>
+              <a:rPr lang="en-US" altLang="ko-KR" sz="2800" dirty="0" smtClean="0"/>
               <a:t>(</a:t>
             </a:r>
             <a:r>
-              <a:rPr lang="ko-KR" altLang="en-US" sz="2800" dirty="0"/>
+              <a:rPr lang="en-US" altLang="ko-KR" sz="2800" dirty="0" err="1" smtClean="0"/>
+              <a:t>TUKorea</a:t>
+            </a:r>
+            <a:r>
+              <a:rPr lang="en-US" altLang="ko-KR" sz="2800" dirty="0" smtClean="0"/>
+              <a:t>, </a:t>
+            </a:r>
+            <a:r>
+              <a:rPr lang="ko-KR" altLang="en-US" sz="2800" dirty="0" smtClean="0"/>
               <a:t>백준</a:t>
             </a:r>
             <a:r>
@@ -9985,8 +10008,23 @@
               <a:rPr lang="en-US" altLang="ko-KR" sz="2800" dirty="0"/>
             </a:br>
             <a:r>
-              <a:rPr lang="en-US" altLang="ko-KR" sz="2800" dirty="0"/>
-              <a:t>https://www.acmicpc.net/problem/5972</a:t>
+              <a:rPr lang="en-US" altLang="ko-KR" sz="2000" dirty="0" smtClean="0"/>
+              <a:t>http</a:t>
+            </a:r>
+            <a:r>
+              <a:rPr lang="en-US" altLang="ko-KR" sz="2000" dirty="0"/>
+              <a:t>://210.93.60.51/problem/0186</a:t>
+            </a:r>
+            <a:br>
+              <a:rPr lang="en-US" altLang="ko-KR" sz="2000" dirty="0"/>
+            </a:br>
+            <a:r>
+              <a:rPr lang="en-US" altLang="ko-KR" sz="2000" dirty="0" smtClean="0"/>
+              <a:t>https</a:t>
+            </a:r>
+            <a:r>
+              <a:rPr lang="en-US" altLang="ko-KR" sz="2000" dirty="0"/>
+              <a:t>://www.acmicpc.net/problem/5972</a:t>
             </a:r>
             <a:endParaRPr lang="ko-KR" altLang="en-US" sz="2000" dirty="0"/>
           </a:p>
@@ -10223,7 +10261,12 @@
             <p:ph type="title"/>
           </p:nvPr>
         </p:nvSpPr>
-        <p:spPr/>
+        <p:spPr>
+          <a:xfrm>
+            <a:off x="107504" y="274638"/>
+            <a:ext cx="8928992" cy="868346"/>
+          </a:xfrm>
+        </p:spPr>
         <p:txBody>
           <a:bodyPr/>
           <a:lstStyle/>
@@ -10237,35 +10280,43 @@
               <a:t>순회강연 </a:t>
             </a:r>
             <a:r>
-              <a:rPr lang="en-US" altLang="ko-KR" sz="2800" dirty="0"/>
+              <a:rPr lang="en-US" altLang="ko-KR" sz="2800" dirty="0" smtClean="0"/>
               <a:t>(</a:t>
             </a:r>
             <a:r>
-              <a:rPr lang="ko-KR" altLang="en-US" sz="2800" dirty="0"/>
+              <a:rPr lang="en-US" altLang="ko-KR" sz="2800" dirty="0" err="1" smtClean="0"/>
+              <a:t>TUKorea</a:t>
+            </a:r>
+            <a:r>
+              <a:rPr lang="en-US" altLang="ko-KR" sz="2800" dirty="0" smtClean="0"/>
+              <a:t>,</a:t>
+            </a:r>
+            <a:r>
+              <a:rPr lang="ko-KR" altLang="en-US" sz="2800" dirty="0" smtClean="0"/>
               <a:t>백준</a:t>
             </a:r>
             <a:r>
-              <a:rPr lang="en-US" altLang="ko-KR" sz="2800" dirty="0"/>
+              <a:rPr lang="en-US" altLang="ko-KR" sz="2800" dirty="0" smtClean="0"/>
               <a:t>, </a:t>
             </a:r>
             <a:r>
-              <a:rPr lang="ko-KR" altLang="en-US" sz="2800" dirty="0" err="1"/>
+              <a:rPr lang="ko-KR" altLang="en-US" sz="2800" dirty="0" smtClean="0"/>
+              <a:t>정렬</a:t>
+            </a:r>
+            <a:r>
+              <a:rPr lang="en-US" altLang="ko-KR" sz="2800" dirty="0" smtClean="0"/>
+              <a:t>, </a:t>
+            </a:r>
+            <a:r>
+              <a:rPr lang="ko-KR" altLang="en-US" sz="2800" dirty="0" err="1" smtClean="0"/>
               <a:t>우선순위큐</a:t>
             </a:r>
             <a:r>
-              <a:rPr lang="en-US" altLang="ko-KR" sz="2800" dirty="0"/>
+              <a:rPr lang="en-US" altLang="ko-KR" sz="2800" dirty="0" smtClean="0"/>
               <a:t>, </a:t>
             </a:r>
             <a:r>
-              <a:rPr lang="ko-KR" altLang="en-US" sz="2800" dirty="0" err="1"/>
-              <a:t>최대힙</a:t>
-            </a:r>
-            <a:r>
-              <a:rPr lang="en-US" altLang="ko-KR" sz="2800" dirty="0"/>
-              <a:t>, </a:t>
-            </a:r>
-            <a:r>
-              <a:rPr lang="ko-KR" altLang="en-US" sz="2800" dirty="0" err="1"/>
+              <a:rPr lang="ko-KR" altLang="en-US" sz="2800" dirty="0" err="1" smtClean="0"/>
               <a:t>그리디</a:t>
             </a:r>
             <a:r>
@@ -10276,8 +10327,23 @@
               <a:rPr lang="en-US" altLang="ko-KR" sz="2800" dirty="0"/>
             </a:br>
             <a:r>
-              <a:rPr lang="en-US" altLang="ko-KR" sz="2800" dirty="0"/>
-              <a:t>https://www.acmicpc.net/problem/2109</a:t>
+              <a:rPr lang="en-US" altLang="ko-KR" sz="2000" dirty="0" smtClean="0"/>
+              <a:t>http</a:t>
+            </a:r>
+            <a:r>
+              <a:rPr lang="en-US" altLang="ko-KR" sz="2000" dirty="0"/>
+              <a:t>://210.93.60.51/problem/0187</a:t>
+            </a:r>
+            <a:br>
+              <a:rPr lang="en-US" altLang="ko-KR" sz="2000" dirty="0"/>
+            </a:br>
+            <a:r>
+              <a:rPr lang="en-US" altLang="ko-KR" sz="2000" dirty="0" smtClean="0"/>
+              <a:t>https</a:t>
+            </a:r>
+            <a:r>
+              <a:rPr lang="en-US" altLang="ko-KR" sz="2000" dirty="0"/>
+              <a:t>://www.acmicpc.net/problem/2109</a:t>
             </a:r>
             <a:endParaRPr lang="ko-KR" altLang="en-US" sz="2000" dirty="0"/>
           </a:p>
@@ -10950,8 +11016,8 @@
               <a:t>3. </a:t>
             </a:r>
             <a:r>
-              <a:rPr lang="ko-KR" altLang="en-US" sz="2400" dirty="0"/>
-              <a:t>소가 길을 건너간 이유</a:t>
+              <a:rPr lang="ko-KR" altLang="en-US" sz="2400" dirty="0" err="1" smtClean="0"/>
+              <a:t>소가길을건너간이유</a:t>
             </a:r>
             <a:r>
               <a:rPr lang="en-US" altLang="ko-KR" sz="2400" dirty="0"/>
@@ -10962,35 +11028,43 @@
               <a:t> </a:t>
             </a:r>
             <a:r>
-              <a:rPr lang="en-US" altLang="ko-KR" sz="2400" dirty="0"/>
+              <a:rPr lang="en-US" altLang="ko-KR" sz="2400" dirty="0" smtClean="0"/>
               <a:t>(</a:t>
             </a:r>
             <a:r>
-              <a:rPr lang="ko-KR" altLang="en-US" sz="2400" dirty="0"/>
+              <a:rPr lang="en-US" altLang="ko-KR" sz="2400" dirty="0" err="1" smtClean="0"/>
+              <a:t>TUKorea</a:t>
+            </a:r>
+            <a:r>
+              <a:rPr lang="en-US" altLang="ko-KR" sz="2400" dirty="0" smtClean="0"/>
+              <a:t>,</a:t>
+            </a:r>
+            <a:r>
+              <a:rPr lang="ko-KR" altLang="en-US" sz="2400" dirty="0" smtClean="0"/>
               <a:t>백준</a:t>
             </a:r>
             <a:r>
-              <a:rPr lang="en-US" altLang="ko-KR" sz="2400" dirty="0"/>
-              <a:t>, </a:t>
-            </a:r>
-            <a:r>
-              <a:rPr lang="ko-KR" altLang="en-US" sz="2400" dirty="0" err="1"/>
+              <a:rPr lang="en-US" altLang="ko-KR" sz="2400" dirty="0" smtClean="0"/>
+              <a:t>,</a:t>
+            </a:r>
+            <a:r>
+              <a:rPr lang="ko-KR" altLang="en-US" sz="2400" dirty="0" err="1" smtClean="0"/>
               <a:t>우선순위큐</a:t>
             </a:r>
             <a:r>
-              <a:rPr lang="en-US" altLang="ko-KR" sz="2400" dirty="0"/>
-              <a:t>, </a:t>
-            </a:r>
-            <a:r>
-              <a:rPr lang="ko-KR" altLang="en-US" sz="2400" dirty="0" err="1"/>
+              <a:rPr lang="en-US" altLang="ko-KR" sz="2400" dirty="0" smtClean="0"/>
+              <a:t>,</a:t>
+            </a:r>
+            <a:r>
+              <a:rPr lang="ko-KR" altLang="en-US" sz="2400" dirty="0" err="1" smtClean="0"/>
               <a:t>최소힙</a:t>
             </a:r>
             <a:r>
-              <a:rPr lang="en-US" altLang="ko-KR" sz="2400" dirty="0"/>
-              <a:t>, </a:t>
-            </a:r>
-            <a:r>
-              <a:rPr lang="ko-KR" altLang="en-US" sz="2400" dirty="0" err="1"/>
+              <a:rPr lang="en-US" altLang="ko-KR" sz="2400" dirty="0" smtClean="0"/>
+              <a:t>,</a:t>
+            </a:r>
+            <a:r>
+              <a:rPr lang="ko-KR" altLang="en-US" sz="2400" dirty="0" err="1" smtClean="0"/>
               <a:t>그리디</a:t>
             </a:r>
             <a:r>
@@ -11001,10 +11075,25 @@
               <a:rPr lang="en-US" altLang="ko-KR" sz="2400" dirty="0"/>
             </a:br>
             <a:r>
-              <a:rPr lang="en-US" altLang="ko-KR" sz="2400" dirty="0"/>
-              <a:t>https://www.acmicpc.net/problem/14464</a:t>
-            </a:r>
-            <a:endParaRPr lang="ko-KR" altLang="en-US" sz="1800" dirty="0"/>
+              <a:rPr lang="en-US" altLang="ko-KR" sz="2000" dirty="0" smtClean="0"/>
+              <a:t>http</a:t>
+            </a:r>
+            <a:r>
+              <a:rPr lang="en-US" altLang="ko-KR" sz="2000" dirty="0"/>
+              <a:t>://210.93.60.51/problem/0188</a:t>
+            </a:r>
+            <a:br>
+              <a:rPr lang="en-US" altLang="ko-KR" sz="2000" dirty="0"/>
+            </a:br>
+            <a:r>
+              <a:rPr lang="en-US" altLang="ko-KR" sz="2000" dirty="0" smtClean="0"/>
+              <a:t>https</a:t>
+            </a:r>
+            <a:r>
+              <a:rPr lang="en-US" altLang="ko-KR" sz="2000" dirty="0"/>
+              <a:t>://www.acmicpc.net/problem/14464</a:t>
+            </a:r>
+            <a:endParaRPr lang="ko-KR" altLang="en-US" sz="1600" dirty="0"/>
           </a:p>
         </p:txBody>
       </p:sp>
@@ -12147,23 +12236,8 @@
                 <a:solidFill>
                   <a:srgbClr val="0000FF"/>
                 </a:solidFill>
-                <a:hlinkClick r:id="rId3">
-                  <a:extLst>
-                    <a:ext uri="{A12FA001-AC4F-418D-AE19-62706E023703}">
-                      <ahyp:hlinkClr xmlns:ahyp="http://schemas.microsoft.com/office/drawing/2018/hyperlinkcolor" xmlns="" val="tx"/>
-                    </a:ext>
-                  </a:extLst>
-                </a:hlinkClick>
               </a:rPr>
               <a:t>https://school.programmers.co.kr/learn/courses/30/lessons/72413</a:t>
-            </a:r>
-            <a:r>
-              <a:rPr lang="en-US" altLang="ko-KR" sz="1600" dirty="0">
-                <a:solidFill>
-                  <a:srgbClr val="0000FF"/>
-                </a:solidFill>
-              </a:rPr>
-              <a:t/>
             </a:r>
             <a:br>
               <a:rPr lang="en-US" altLang="ko-KR" sz="1600" dirty="0">
@@ -12177,23 +12251,8 @@
                 <a:solidFill>
                   <a:srgbClr val="0000FF"/>
                 </a:solidFill>
-                <a:hlinkClick r:id="rId4">
-                  <a:extLst>
-                    <a:ext uri="{A12FA001-AC4F-418D-AE19-62706E023703}">
-                      <ahyp:hlinkClr xmlns:ahyp="http://schemas.microsoft.com/office/drawing/2018/hyperlinkcolor" xmlns="" val="tx"/>
-                    </a:ext>
-                  </a:extLst>
-                </a:hlinkClick>
               </a:rPr>
               <a:t>https://www.youtube.com/watch?v=ejkvFLxDngQ&amp;list=PLg0hsGjqxAUZimgPzzUdTjrV0bn5ALtAl&amp;index=14</a:t>
-            </a:r>
-            <a:r>
-              <a:rPr lang="en-US" altLang="ko-KR" sz="1600" dirty="0">
-                <a:solidFill>
-                  <a:srgbClr val="0000FF"/>
-                </a:solidFill>
-              </a:rPr>
-              <a:t/>
             </a:r>
             <a:br>
               <a:rPr lang="en-US" altLang="ko-KR" sz="1600" dirty="0">
@@ -12207,23 +12266,8 @@
                 <a:solidFill>
                   <a:srgbClr val="0000FF"/>
                 </a:solidFill>
-                <a:hlinkClick r:id="rId5">
-                  <a:extLst>
-                    <a:ext uri="{A12FA001-AC4F-418D-AE19-62706E023703}">
-                      <ahyp:hlinkClr xmlns:ahyp="http://schemas.microsoft.com/office/drawing/2018/hyperlinkcolor" xmlns="" val="tx"/>
-                    </a:ext>
-                  </a:extLst>
-                </a:hlinkClick>
               </a:rPr>
               <a:t>https://www.youtube.com/watch?v=0QiXS0_TTVU&amp;list=PLg0hsGjqxAUZimgPzzUdTjrV0bn5ALtAl&amp;index=34</a:t>
-            </a:r>
-            <a:r>
-              <a:rPr lang="en-US" altLang="ko-KR" sz="1600" dirty="0">
-                <a:solidFill>
-                  <a:srgbClr val="0000FF"/>
-                </a:solidFill>
-              </a:rPr>
-              <a:t/>
             </a:r>
             <a:br>
               <a:rPr lang="en-US" altLang="ko-KR" sz="1600" dirty="0">
@@ -12594,7 +12638,7 @@
           <p:nvPr/>
         </p:nvPicPr>
         <p:blipFill>
-          <a:blip r:embed="rId6" cstate="print">
+          <a:blip r:embed="rId3" cstate="print">
             <a:extLst>
               <a:ext uri="{28A0092B-C50C-407E-A947-70E740481C1C}">
                 <a14:useLocalDpi xmlns:a14="http://schemas.microsoft.com/office/drawing/2010/main" val="0"/>
